--- a/digests/2026-10-17-6/orca/slides-vi.pptx
+++ b/digests/2026-10-17-6/orca/slides-vi.pptx
@@ -8456,8 +8456,8 @@
         </p:nvSpPr>
         <p:spPr>
           <a:xfrm>
-            <a:off x="2402840" y="3101339"/>
-            <a:ext cx="2834640" cy="724409"/>
+            <a:off x="2402840" y="3101847"/>
+            <a:ext cx="2834640" cy="723901"/>
           </a:xfrm>
           <a:custGeom>
             <a:avLst/>
@@ -8466,7 +8466,7 @@
             <a:cxnLst/>
             <a:rect l="l" t="t" r="r" b="b"/>
             <a:pathLst>
-              <a:path w="2834640" h="724409">
+              <a:path w="2834640" h="723901">
                 <a:moveTo>
                   <a:pt x="0" y="0"/>
                 </a:moveTo>
@@ -8474,10 +8474,10 @@
                   <a:pt x="1417319" y="0"/>
                 </a:lnTo>
                 <a:lnTo>
-                  <a:pt x="1417319" y="724409"/>
+                  <a:pt x="1417319" y="723901"/>
                 </a:lnTo>
                 <a:lnTo>
-                  <a:pt x="2834640" y="724409"/>
+                  <a:pt x="2834640" y="723901"/>
                 </a:lnTo>
               </a:path>
             </a:pathLst>
@@ -8507,7 +8507,7 @@
         <p:spPr>
           <a:xfrm>
             <a:off x="2402840" y="3825748"/>
-            <a:ext cx="558800" cy="724408"/>
+            <a:ext cx="558800" cy="723900"/>
           </a:xfrm>
           <a:custGeom>
             <a:avLst/>
@@ -8516,12 +8516,12 @@
             <a:cxnLst/>
             <a:rect l="l" t="t" r="r" b="b"/>
             <a:pathLst>
-              <a:path w="558800" h="724408">
+              <a:path w="558800" h="723900">
                 <a:moveTo>
-                  <a:pt x="0" y="724408"/>
+                  <a:pt x="0" y="723900"/>
                 </a:moveTo>
                 <a:lnTo>
-                  <a:pt x="279400" y="724408"/>
+                  <a:pt x="279400" y="723900"/>
                 </a:lnTo>
                 <a:lnTo>
                   <a:pt x="279400" y="0"/>
@@ -8600,12 +8600,12 @@
         </p:nvSpPr>
         <p:spPr>
           <a:xfrm>
-            <a:off x="5237480" y="3279140"/>
-            <a:ext cx="1717039" cy="1093216"/>
+            <a:off x="5237480" y="3279648"/>
+            <a:ext cx="1717039" cy="1092200"/>
           </a:xfrm>
           <a:prstGeom prst="roundRect">
             <a:avLst>
-              <a:gd name="adj" fmla="val 18587"/>
+              <a:gd name="adj" fmla="val 18604"/>
             </a:avLst>
           </a:prstGeom>
           <a:solidFill>
@@ -8633,8 +8633,8 @@
         </p:nvSpPr>
         <p:spPr>
           <a:xfrm>
-            <a:off x="5415280" y="3380740"/>
-            <a:ext cx="1361439" cy="890016"/>
+            <a:off x="5415280" y="3381248"/>
+            <a:ext cx="1361439" cy="889000"/>
           </a:xfrm>
           <a:prstGeom prst="rect">
             <a:avLst/>
@@ -8653,7 +8653,7 @@
               </a:lnSpc>
             </a:pPr>
             <a:r>
-              <a:rPr sz="1800" b="1">
+              <a:rPr sz="2200" b="1">
                 <a:solidFill>
                   <a:srgbClr val="0F172A"/>
                 </a:solidFill>
@@ -8672,12 +8672,12 @@
         </p:nvSpPr>
         <p:spPr>
           <a:xfrm>
-            <a:off x="7513319" y="3279140"/>
-            <a:ext cx="1717039" cy="1093216"/>
+            <a:off x="7513319" y="3279648"/>
+            <a:ext cx="1717039" cy="1092200"/>
           </a:xfrm>
           <a:prstGeom prst="roundRect">
             <a:avLst>
-              <a:gd name="adj" fmla="val 18587"/>
+              <a:gd name="adj" fmla="val 18604"/>
             </a:avLst>
           </a:prstGeom>
           <a:solidFill>
@@ -8705,8 +8705,8 @@
         </p:nvSpPr>
         <p:spPr>
           <a:xfrm>
-            <a:off x="7691119" y="3380740"/>
-            <a:ext cx="1361439" cy="890016"/>
+            <a:off x="7691119" y="3381248"/>
+            <a:ext cx="1361439" cy="889000"/>
           </a:xfrm>
           <a:prstGeom prst="rect">
             <a:avLst/>
@@ -8725,7 +8725,7 @@
               </a:lnSpc>
             </a:pPr>
             <a:r>
-              <a:rPr sz="1800" b="1">
+              <a:rPr sz="2200" b="1">
                 <a:solidFill>
                   <a:srgbClr val="0F172A"/>
                 </a:solidFill>
@@ -8744,12 +8744,12 @@
         </p:nvSpPr>
         <p:spPr>
           <a:xfrm>
-            <a:off x="9789160" y="3279140"/>
-            <a:ext cx="1717039" cy="1093216"/>
+            <a:off x="9789160" y="3279648"/>
+            <a:ext cx="1717039" cy="1092200"/>
           </a:xfrm>
           <a:prstGeom prst="roundRect">
             <a:avLst>
-              <a:gd name="adj" fmla="val 18587"/>
+              <a:gd name="adj" fmla="val 18604"/>
             </a:avLst>
           </a:prstGeom>
           <a:solidFill>
@@ -8777,8 +8777,8 @@
         </p:nvSpPr>
         <p:spPr>
           <a:xfrm>
-            <a:off x="9966960" y="3380740"/>
-            <a:ext cx="1361439" cy="890016"/>
+            <a:off x="9966960" y="3381248"/>
+            <a:ext cx="1361439" cy="889000"/>
           </a:xfrm>
           <a:prstGeom prst="rect">
             <a:avLst/>
@@ -8797,7 +8797,7 @@
               </a:lnSpc>
             </a:pPr>
             <a:r>
-              <a:rPr sz="1800" b="1">
+              <a:rPr sz="2200" b="1">
                 <a:solidFill>
                   <a:srgbClr val="0F172A"/>
                 </a:solidFill>
@@ -8816,12 +8816,12 @@
         </p:nvSpPr>
         <p:spPr>
           <a:xfrm>
-            <a:off x="685800" y="2554731"/>
-            <a:ext cx="1717039" cy="1093216"/>
+            <a:off x="685800" y="2555747"/>
+            <a:ext cx="1717039" cy="1092200"/>
           </a:xfrm>
           <a:prstGeom prst="roundRect">
             <a:avLst>
-              <a:gd name="adj" fmla="val 18587"/>
+              <a:gd name="adj" fmla="val 18604"/>
             </a:avLst>
           </a:prstGeom>
           <a:solidFill>
@@ -8849,8 +8849,8 @@
         </p:nvSpPr>
         <p:spPr>
           <a:xfrm>
-            <a:off x="863600" y="2656331"/>
-            <a:ext cx="1361439" cy="890016"/>
+            <a:off x="863600" y="2657347"/>
+            <a:ext cx="1361439" cy="889000"/>
           </a:xfrm>
           <a:prstGeom prst="rect">
             <a:avLst/>
@@ -8869,7 +8869,7 @@
               </a:lnSpc>
             </a:pPr>
             <a:r>
-              <a:rPr sz="1800" b="1">
+              <a:rPr sz="2200" b="1">
                 <a:solidFill>
                   <a:srgbClr val="0F172A"/>
                 </a:solidFill>
@@ -8888,12 +8888,12 @@
         </p:nvSpPr>
         <p:spPr>
           <a:xfrm>
-            <a:off x="685800" y="4003547"/>
-            <a:ext cx="1717039" cy="1093216"/>
+            <a:off x="685800" y="4003548"/>
+            <a:ext cx="1717039" cy="1092200"/>
           </a:xfrm>
           <a:prstGeom prst="roundRect">
             <a:avLst>
-              <a:gd name="adj" fmla="val 18587"/>
+              <a:gd name="adj" fmla="val 18604"/>
             </a:avLst>
           </a:prstGeom>
           <a:solidFill>
@@ -8921,8 +8921,8 @@
         </p:nvSpPr>
         <p:spPr>
           <a:xfrm>
-            <a:off x="863600" y="4105147"/>
-            <a:ext cx="1361439" cy="890016"/>
+            <a:off x="863600" y="4105148"/>
+            <a:ext cx="1361439" cy="889000"/>
           </a:xfrm>
           <a:prstGeom prst="rect">
             <a:avLst/>
@@ -8941,7 +8941,7 @@
               </a:lnSpc>
             </a:pPr>
             <a:r>
-              <a:rPr sz="1800" b="1">
+              <a:rPr sz="2200" b="1">
                 <a:solidFill>
                   <a:srgbClr val="0F172A"/>
                 </a:solidFill>
@@ -8960,12 +8960,12 @@
         </p:nvSpPr>
         <p:spPr>
           <a:xfrm>
-            <a:off x="2961640" y="3279140"/>
-            <a:ext cx="1717039" cy="1093216"/>
+            <a:off x="2961640" y="3279648"/>
+            <a:ext cx="1717039" cy="1092200"/>
           </a:xfrm>
           <a:prstGeom prst="roundRect">
             <a:avLst>
-              <a:gd name="adj" fmla="val 18587"/>
+              <a:gd name="adj" fmla="val 18604"/>
             </a:avLst>
           </a:prstGeom>
           <a:solidFill>
@@ -8993,8 +8993,8 @@
         </p:nvSpPr>
         <p:spPr>
           <a:xfrm>
-            <a:off x="3139440" y="3380740"/>
-            <a:ext cx="1361439" cy="890016"/>
+            <a:off x="3139440" y="3381248"/>
+            <a:ext cx="1361439" cy="889000"/>
           </a:xfrm>
           <a:prstGeom prst="rect">
             <a:avLst/>
@@ -9013,7 +9013,7 @@
               </a:lnSpc>
             </a:pPr>
             <a:r>
-              <a:rPr sz="1800" b="1">
+              <a:rPr sz="2200" b="1">
                 <a:solidFill>
                   <a:srgbClr val="0F172A"/>
                 </a:solidFill>
@@ -13747,14 +13747,14 @@
       </p:sp>
       <p:sp>
         <p:nvSpPr>
-          <p:cNvPr id="3" name="text"/>
+          <p:cNvPr id="3" name="card text"/>
           <p:cNvSpPr txBox="1"/>
           <p:nvPr/>
         </p:nvSpPr>
         <p:spPr>
           <a:xfrm>
             <a:off x="685800" y="1326895"/>
-            <a:ext cx="10820400" cy="1318768"/>
+            <a:ext cx="10820400" cy="1267968"/>
           </a:xfrm>
           <a:prstGeom prst="rect">
             <a:avLst/>
@@ -13792,7 +13792,7 @@
         </p:nvSpPr>
         <p:spPr>
           <a:xfrm>
-            <a:off x="685800" y="2772664"/>
+            <a:off x="685800" y="2721864"/>
             <a:ext cx="10820400" cy="1545844"/>
           </a:xfrm>
           <a:prstGeom prst="roundRect">
@@ -13823,7 +13823,7 @@
         </p:nvSpPr>
         <p:spPr>
           <a:xfrm>
-            <a:off x="889000" y="2912364"/>
+            <a:off x="889000" y="2861564"/>
             <a:ext cx="76200" cy="1266444"/>
           </a:xfrm>
           <a:prstGeom prst="roundRect">
@@ -13854,7 +13854,7 @@
         </p:nvSpPr>
         <p:spPr>
           <a:xfrm>
-            <a:off x="1143000" y="2912364"/>
+            <a:off x="1143000" y="2861564"/>
             <a:ext cx="10083800" cy="1266444"/>
           </a:xfrm>
           <a:prstGeom prst="rect">
